--- a/靠著耶穌得勝.pptx
+++ b/靠著耶穌得勝.pptx
@@ -168,7 +168,7 @@
           <a:lstStyle/>
           <a:p>
             <a:r>
-              <a:rPr lang="en-US" altLang="zh-TW" smtClean="0"/>
+              <a:rPr lang="en-US" altLang="zh-TW"/>
               <a:t>Click to edit Master title style</a:t>
             </a:r>
             <a:endParaRPr lang="zh-TW" altLang="en-US"/>
@@ -287,7 +287,7 @@
           </a:lstStyle>
           <a:p>
             <a:r>
-              <a:rPr lang="en-US" altLang="zh-TW" smtClean="0"/>
+              <a:rPr lang="en-US" altLang="zh-TW"/>
               <a:t>Click to edit Master subtitle style</a:t>
             </a:r>
             <a:endParaRPr lang="zh-TW" altLang="en-US"/>
@@ -311,7 +311,7 @@
           <a:p>
             <a:fld id="{90650502-3618-4BDE-8B7B-6341F82301FD}" type="datetimeFigureOut">
               <a:rPr lang="zh-TW" altLang="en-US" smtClean="0"/>
-              <a:t>2022/1/7</a:t>
+              <a:t>2025/5/9</a:t>
             </a:fld>
             <a:endParaRPr lang="zh-TW" altLang="en-US"/>
           </a:p>
@@ -400,7 +400,7 @@
           <a:lstStyle/>
           <a:p>
             <a:r>
-              <a:rPr lang="en-US" altLang="zh-TW" smtClean="0"/>
+              <a:rPr lang="en-US" altLang="zh-TW"/>
               <a:t>Click to edit Master title style</a:t>
             </a:r>
             <a:endParaRPr lang="zh-TW" altLang="en-US"/>
@@ -424,35 +424,35 @@
           <a:p>
             <a:pPr lvl="0"/>
             <a:r>
-              <a:rPr lang="en-US" altLang="zh-TW" smtClean="0"/>
+              <a:rPr lang="en-US" altLang="zh-TW"/>
               <a:t>Click to edit Master text styles</a:t>
             </a:r>
           </a:p>
           <a:p>
             <a:pPr lvl="1"/>
             <a:r>
-              <a:rPr lang="en-US" altLang="zh-TW" smtClean="0"/>
+              <a:rPr lang="en-US" altLang="zh-TW"/>
               <a:t>Second level</a:t>
             </a:r>
           </a:p>
           <a:p>
             <a:pPr lvl="2"/>
             <a:r>
-              <a:rPr lang="en-US" altLang="zh-TW" smtClean="0"/>
+              <a:rPr lang="en-US" altLang="zh-TW"/>
               <a:t>Third level</a:t>
             </a:r>
           </a:p>
           <a:p>
             <a:pPr lvl="3"/>
             <a:r>
-              <a:rPr lang="en-US" altLang="zh-TW" smtClean="0"/>
+              <a:rPr lang="en-US" altLang="zh-TW"/>
               <a:t>Fourth level</a:t>
             </a:r>
           </a:p>
           <a:p>
             <a:pPr lvl="4"/>
             <a:r>
-              <a:rPr lang="en-US" altLang="zh-TW" smtClean="0"/>
+              <a:rPr lang="en-US" altLang="zh-TW"/>
               <a:t>Fifth level</a:t>
             </a:r>
             <a:endParaRPr lang="zh-TW" altLang="en-US"/>
@@ -476,7 +476,7 @@
           <a:p>
             <a:fld id="{90650502-3618-4BDE-8B7B-6341F82301FD}" type="datetimeFigureOut">
               <a:rPr lang="zh-TW" altLang="en-US" smtClean="0"/>
-              <a:t>2022/1/7</a:t>
+              <a:t>2025/5/9</a:t>
             </a:fld>
             <a:endParaRPr lang="zh-TW" altLang="en-US"/>
           </a:p>
@@ -570,7 +570,7 @@
           <a:lstStyle/>
           <a:p>
             <a:r>
-              <a:rPr lang="en-US" altLang="zh-TW" smtClean="0"/>
+              <a:rPr lang="en-US" altLang="zh-TW"/>
               <a:t>Click to edit Master title style</a:t>
             </a:r>
             <a:endParaRPr lang="zh-TW" altLang="en-US"/>
@@ -599,35 +599,35 @@
           <a:p>
             <a:pPr lvl="0"/>
             <a:r>
-              <a:rPr lang="en-US" altLang="zh-TW" smtClean="0"/>
+              <a:rPr lang="en-US" altLang="zh-TW"/>
               <a:t>Click to edit Master text styles</a:t>
             </a:r>
           </a:p>
           <a:p>
             <a:pPr lvl="1"/>
             <a:r>
-              <a:rPr lang="en-US" altLang="zh-TW" smtClean="0"/>
+              <a:rPr lang="en-US" altLang="zh-TW"/>
               <a:t>Second level</a:t>
             </a:r>
           </a:p>
           <a:p>
             <a:pPr lvl="2"/>
             <a:r>
-              <a:rPr lang="en-US" altLang="zh-TW" smtClean="0"/>
+              <a:rPr lang="en-US" altLang="zh-TW"/>
               <a:t>Third level</a:t>
             </a:r>
           </a:p>
           <a:p>
             <a:pPr lvl="3"/>
             <a:r>
-              <a:rPr lang="en-US" altLang="zh-TW" smtClean="0"/>
+              <a:rPr lang="en-US" altLang="zh-TW"/>
               <a:t>Fourth level</a:t>
             </a:r>
           </a:p>
           <a:p>
             <a:pPr lvl="4"/>
             <a:r>
-              <a:rPr lang="en-US" altLang="zh-TW" smtClean="0"/>
+              <a:rPr lang="en-US" altLang="zh-TW"/>
               <a:t>Fifth level</a:t>
             </a:r>
             <a:endParaRPr lang="zh-TW" altLang="en-US"/>
@@ -651,7 +651,7 @@
           <a:p>
             <a:fld id="{90650502-3618-4BDE-8B7B-6341F82301FD}" type="datetimeFigureOut">
               <a:rPr lang="zh-TW" altLang="en-US" smtClean="0"/>
-              <a:t>2022/1/7</a:t>
+              <a:t>2025/5/9</a:t>
             </a:fld>
             <a:endParaRPr lang="zh-TW" altLang="en-US"/>
           </a:p>
@@ -740,7 +740,7 @@
           <a:lstStyle/>
           <a:p>
             <a:r>
-              <a:rPr lang="en-US" altLang="zh-TW" smtClean="0"/>
+              <a:rPr lang="en-US" altLang="zh-TW"/>
               <a:t>Click to edit Master title style</a:t>
             </a:r>
             <a:endParaRPr lang="zh-TW" altLang="en-US"/>
@@ -764,35 +764,35 @@
           <a:p>
             <a:pPr lvl="0"/>
             <a:r>
-              <a:rPr lang="en-US" altLang="zh-TW" smtClean="0"/>
+              <a:rPr lang="en-US" altLang="zh-TW"/>
               <a:t>Click to edit Master text styles</a:t>
             </a:r>
           </a:p>
           <a:p>
             <a:pPr lvl="1"/>
             <a:r>
-              <a:rPr lang="en-US" altLang="zh-TW" smtClean="0"/>
+              <a:rPr lang="en-US" altLang="zh-TW"/>
               <a:t>Second level</a:t>
             </a:r>
           </a:p>
           <a:p>
             <a:pPr lvl="2"/>
             <a:r>
-              <a:rPr lang="en-US" altLang="zh-TW" smtClean="0"/>
+              <a:rPr lang="en-US" altLang="zh-TW"/>
               <a:t>Third level</a:t>
             </a:r>
           </a:p>
           <a:p>
             <a:pPr lvl="3"/>
             <a:r>
-              <a:rPr lang="en-US" altLang="zh-TW" smtClean="0"/>
+              <a:rPr lang="en-US" altLang="zh-TW"/>
               <a:t>Fourth level</a:t>
             </a:r>
           </a:p>
           <a:p>
             <a:pPr lvl="4"/>
             <a:r>
-              <a:rPr lang="en-US" altLang="zh-TW" smtClean="0"/>
+              <a:rPr lang="en-US" altLang="zh-TW"/>
               <a:t>Fifth level</a:t>
             </a:r>
             <a:endParaRPr lang="zh-TW" altLang="en-US"/>
@@ -816,7 +816,7 @@
           <a:p>
             <a:fld id="{90650502-3618-4BDE-8B7B-6341F82301FD}" type="datetimeFigureOut">
               <a:rPr lang="zh-TW" altLang="en-US" smtClean="0"/>
-              <a:t>2022/1/7</a:t>
+              <a:t>2025/5/9</a:t>
             </a:fld>
             <a:endParaRPr lang="zh-TW" altLang="en-US"/>
           </a:p>
@@ -914,7 +914,7 @@
           </a:lstStyle>
           <a:p>
             <a:r>
-              <a:rPr lang="en-US" altLang="zh-TW" smtClean="0"/>
+              <a:rPr lang="en-US" altLang="zh-TW"/>
               <a:t>Click to edit Master title style</a:t>
             </a:r>
             <a:endParaRPr lang="zh-TW" altLang="en-US"/>
@@ -1034,7 +1034,7 @@
           <a:p>
             <a:pPr lvl="0"/>
             <a:r>
-              <a:rPr lang="en-US" altLang="zh-TW" smtClean="0"/>
+              <a:rPr lang="en-US" altLang="zh-TW"/>
               <a:t>Click to edit Master text styles</a:t>
             </a:r>
           </a:p>
@@ -1057,7 +1057,7 @@
           <a:p>
             <a:fld id="{90650502-3618-4BDE-8B7B-6341F82301FD}" type="datetimeFigureOut">
               <a:rPr lang="zh-TW" altLang="en-US" smtClean="0"/>
-              <a:t>2022/1/7</a:t>
+              <a:t>2025/5/9</a:t>
             </a:fld>
             <a:endParaRPr lang="zh-TW" altLang="en-US"/>
           </a:p>
@@ -1146,7 +1146,7 @@
           <a:lstStyle/>
           <a:p>
             <a:r>
-              <a:rPr lang="en-US" altLang="zh-TW" smtClean="0"/>
+              <a:rPr lang="en-US" altLang="zh-TW"/>
               <a:t>Click to edit Master title style</a:t>
             </a:r>
             <a:endParaRPr lang="zh-TW" altLang="en-US"/>
@@ -1203,35 +1203,35 @@
           <a:p>
             <a:pPr lvl="0"/>
             <a:r>
-              <a:rPr lang="en-US" altLang="zh-TW" smtClean="0"/>
+              <a:rPr lang="en-US" altLang="zh-TW"/>
               <a:t>Click to edit Master text styles</a:t>
             </a:r>
           </a:p>
           <a:p>
             <a:pPr lvl="1"/>
             <a:r>
-              <a:rPr lang="en-US" altLang="zh-TW" smtClean="0"/>
+              <a:rPr lang="en-US" altLang="zh-TW"/>
               <a:t>Second level</a:t>
             </a:r>
           </a:p>
           <a:p>
             <a:pPr lvl="2"/>
             <a:r>
-              <a:rPr lang="en-US" altLang="zh-TW" smtClean="0"/>
+              <a:rPr lang="en-US" altLang="zh-TW"/>
               <a:t>Third level</a:t>
             </a:r>
           </a:p>
           <a:p>
             <a:pPr lvl="3"/>
             <a:r>
-              <a:rPr lang="en-US" altLang="zh-TW" smtClean="0"/>
+              <a:rPr lang="en-US" altLang="zh-TW"/>
               <a:t>Fourth level</a:t>
             </a:r>
           </a:p>
           <a:p>
             <a:pPr lvl="4"/>
             <a:r>
-              <a:rPr lang="en-US" altLang="zh-TW" smtClean="0"/>
+              <a:rPr lang="en-US" altLang="zh-TW"/>
               <a:t>Fifth level</a:t>
             </a:r>
             <a:endParaRPr lang="zh-TW" altLang="en-US"/>
@@ -1288,35 +1288,35 @@
           <a:p>
             <a:pPr lvl="0"/>
             <a:r>
-              <a:rPr lang="en-US" altLang="zh-TW" smtClean="0"/>
+              <a:rPr lang="en-US" altLang="zh-TW"/>
               <a:t>Click to edit Master text styles</a:t>
             </a:r>
           </a:p>
           <a:p>
             <a:pPr lvl="1"/>
             <a:r>
-              <a:rPr lang="en-US" altLang="zh-TW" smtClean="0"/>
+              <a:rPr lang="en-US" altLang="zh-TW"/>
               <a:t>Second level</a:t>
             </a:r>
           </a:p>
           <a:p>
             <a:pPr lvl="2"/>
             <a:r>
-              <a:rPr lang="en-US" altLang="zh-TW" smtClean="0"/>
+              <a:rPr lang="en-US" altLang="zh-TW"/>
               <a:t>Third level</a:t>
             </a:r>
           </a:p>
           <a:p>
             <a:pPr lvl="3"/>
             <a:r>
-              <a:rPr lang="en-US" altLang="zh-TW" smtClean="0"/>
+              <a:rPr lang="en-US" altLang="zh-TW"/>
               <a:t>Fourth level</a:t>
             </a:r>
           </a:p>
           <a:p>
             <a:pPr lvl="4"/>
             <a:r>
-              <a:rPr lang="en-US" altLang="zh-TW" smtClean="0"/>
+              <a:rPr lang="en-US" altLang="zh-TW"/>
               <a:t>Fifth level</a:t>
             </a:r>
             <a:endParaRPr lang="zh-TW" altLang="en-US"/>
@@ -1340,7 +1340,7 @@
           <a:p>
             <a:fld id="{90650502-3618-4BDE-8B7B-6341F82301FD}" type="datetimeFigureOut">
               <a:rPr lang="zh-TW" altLang="en-US" smtClean="0"/>
-              <a:t>2022/1/7</a:t>
+              <a:t>2025/5/9</a:t>
             </a:fld>
             <a:endParaRPr lang="zh-TW" altLang="en-US"/>
           </a:p>
@@ -1433,7 +1433,7 @@
           </a:lstStyle>
           <a:p>
             <a:r>
-              <a:rPr lang="en-US" altLang="zh-TW" smtClean="0"/>
+              <a:rPr lang="en-US" altLang="zh-TW"/>
               <a:t>Click to edit Master title style</a:t>
             </a:r>
             <a:endParaRPr lang="zh-TW" altLang="en-US"/>
@@ -1499,7 +1499,7 @@
           <a:p>
             <a:pPr lvl="0"/>
             <a:r>
-              <a:rPr lang="en-US" altLang="zh-TW" smtClean="0"/>
+              <a:rPr lang="en-US" altLang="zh-TW"/>
               <a:t>Click to edit Master text styles</a:t>
             </a:r>
           </a:p>
@@ -1555,35 +1555,35 @@
           <a:p>
             <a:pPr lvl="0"/>
             <a:r>
-              <a:rPr lang="en-US" altLang="zh-TW" smtClean="0"/>
+              <a:rPr lang="en-US" altLang="zh-TW"/>
               <a:t>Click to edit Master text styles</a:t>
             </a:r>
           </a:p>
           <a:p>
             <a:pPr lvl="1"/>
             <a:r>
-              <a:rPr lang="en-US" altLang="zh-TW" smtClean="0"/>
+              <a:rPr lang="en-US" altLang="zh-TW"/>
               <a:t>Second level</a:t>
             </a:r>
           </a:p>
           <a:p>
             <a:pPr lvl="2"/>
             <a:r>
-              <a:rPr lang="en-US" altLang="zh-TW" smtClean="0"/>
+              <a:rPr lang="en-US" altLang="zh-TW"/>
               <a:t>Third level</a:t>
             </a:r>
           </a:p>
           <a:p>
             <a:pPr lvl="3"/>
             <a:r>
-              <a:rPr lang="en-US" altLang="zh-TW" smtClean="0"/>
+              <a:rPr lang="en-US" altLang="zh-TW"/>
               <a:t>Fourth level</a:t>
             </a:r>
           </a:p>
           <a:p>
             <a:pPr lvl="4"/>
             <a:r>
-              <a:rPr lang="en-US" altLang="zh-TW" smtClean="0"/>
+              <a:rPr lang="en-US" altLang="zh-TW"/>
               <a:t>Fifth level</a:t>
             </a:r>
             <a:endParaRPr lang="zh-TW" altLang="en-US"/>
@@ -1649,7 +1649,7 @@
           <a:p>
             <a:pPr lvl="0"/>
             <a:r>
-              <a:rPr lang="en-US" altLang="zh-TW" smtClean="0"/>
+              <a:rPr lang="en-US" altLang="zh-TW"/>
               <a:t>Click to edit Master text styles</a:t>
             </a:r>
           </a:p>
@@ -1705,35 +1705,35 @@
           <a:p>
             <a:pPr lvl="0"/>
             <a:r>
-              <a:rPr lang="en-US" altLang="zh-TW" smtClean="0"/>
+              <a:rPr lang="en-US" altLang="zh-TW"/>
               <a:t>Click to edit Master text styles</a:t>
             </a:r>
           </a:p>
           <a:p>
             <a:pPr lvl="1"/>
             <a:r>
-              <a:rPr lang="en-US" altLang="zh-TW" smtClean="0"/>
+              <a:rPr lang="en-US" altLang="zh-TW"/>
               <a:t>Second level</a:t>
             </a:r>
           </a:p>
           <a:p>
             <a:pPr lvl="2"/>
             <a:r>
-              <a:rPr lang="en-US" altLang="zh-TW" smtClean="0"/>
+              <a:rPr lang="en-US" altLang="zh-TW"/>
               <a:t>Third level</a:t>
             </a:r>
           </a:p>
           <a:p>
             <a:pPr lvl="3"/>
             <a:r>
-              <a:rPr lang="en-US" altLang="zh-TW" smtClean="0"/>
+              <a:rPr lang="en-US" altLang="zh-TW"/>
               <a:t>Fourth level</a:t>
             </a:r>
           </a:p>
           <a:p>
             <a:pPr lvl="4"/>
             <a:r>
-              <a:rPr lang="en-US" altLang="zh-TW" smtClean="0"/>
+              <a:rPr lang="en-US" altLang="zh-TW"/>
               <a:t>Fifth level</a:t>
             </a:r>
             <a:endParaRPr lang="zh-TW" altLang="en-US"/>
@@ -1757,7 +1757,7 @@
           <a:p>
             <a:fld id="{90650502-3618-4BDE-8B7B-6341F82301FD}" type="datetimeFigureOut">
               <a:rPr lang="zh-TW" altLang="en-US" smtClean="0"/>
-              <a:t>2022/1/7</a:t>
+              <a:t>2025/5/9</a:t>
             </a:fld>
             <a:endParaRPr lang="zh-TW" altLang="en-US"/>
           </a:p>
@@ -1846,7 +1846,7 @@
           <a:lstStyle/>
           <a:p>
             <a:r>
-              <a:rPr lang="en-US" altLang="zh-TW" smtClean="0"/>
+              <a:rPr lang="en-US" altLang="zh-TW"/>
               <a:t>Click to edit Master title style</a:t>
             </a:r>
             <a:endParaRPr lang="zh-TW" altLang="en-US"/>
@@ -1870,7 +1870,7 @@
           <a:p>
             <a:fld id="{90650502-3618-4BDE-8B7B-6341F82301FD}" type="datetimeFigureOut">
               <a:rPr lang="zh-TW" altLang="en-US" smtClean="0"/>
-              <a:t>2022/1/7</a:t>
+              <a:t>2025/5/9</a:t>
             </a:fld>
             <a:endParaRPr lang="zh-TW" altLang="en-US"/>
           </a:p>
@@ -1960,7 +1960,7 @@
           <a:p>
             <a:fld id="{90650502-3618-4BDE-8B7B-6341F82301FD}" type="datetimeFigureOut">
               <a:rPr lang="zh-TW" altLang="en-US" smtClean="0"/>
-              <a:t>2022/1/7</a:t>
+              <a:t>2025/5/9</a:t>
             </a:fld>
             <a:endParaRPr lang="zh-TW" altLang="en-US"/>
           </a:p>
@@ -2058,7 +2058,7 @@
           </a:lstStyle>
           <a:p>
             <a:r>
-              <a:rPr lang="en-US" altLang="zh-TW" smtClean="0"/>
+              <a:rPr lang="en-US" altLang="zh-TW"/>
               <a:t>Click to edit Master title style</a:t>
             </a:r>
             <a:endParaRPr lang="zh-TW" altLang="en-US"/>
@@ -2115,35 +2115,35 @@
           <a:p>
             <a:pPr lvl="0"/>
             <a:r>
-              <a:rPr lang="en-US" altLang="zh-TW" smtClean="0"/>
+              <a:rPr lang="en-US" altLang="zh-TW"/>
               <a:t>Click to edit Master text styles</a:t>
             </a:r>
           </a:p>
           <a:p>
             <a:pPr lvl="1"/>
             <a:r>
-              <a:rPr lang="en-US" altLang="zh-TW" smtClean="0"/>
+              <a:rPr lang="en-US" altLang="zh-TW"/>
               <a:t>Second level</a:t>
             </a:r>
           </a:p>
           <a:p>
             <a:pPr lvl="2"/>
             <a:r>
-              <a:rPr lang="en-US" altLang="zh-TW" smtClean="0"/>
+              <a:rPr lang="en-US" altLang="zh-TW"/>
               <a:t>Third level</a:t>
             </a:r>
           </a:p>
           <a:p>
             <a:pPr lvl="3"/>
             <a:r>
-              <a:rPr lang="en-US" altLang="zh-TW" smtClean="0"/>
+              <a:rPr lang="en-US" altLang="zh-TW"/>
               <a:t>Fourth level</a:t>
             </a:r>
           </a:p>
           <a:p>
             <a:pPr lvl="4"/>
             <a:r>
-              <a:rPr lang="en-US" altLang="zh-TW" smtClean="0"/>
+              <a:rPr lang="en-US" altLang="zh-TW"/>
               <a:t>Fifth level</a:t>
             </a:r>
             <a:endParaRPr lang="zh-TW" altLang="en-US"/>
@@ -2209,7 +2209,7 @@
           <a:p>
             <a:pPr lvl="0"/>
             <a:r>
-              <a:rPr lang="en-US" altLang="zh-TW" smtClean="0"/>
+              <a:rPr lang="en-US" altLang="zh-TW"/>
               <a:t>Click to edit Master text styles</a:t>
             </a:r>
           </a:p>
@@ -2232,7 +2232,7 @@
           <a:p>
             <a:fld id="{90650502-3618-4BDE-8B7B-6341F82301FD}" type="datetimeFigureOut">
               <a:rPr lang="zh-TW" altLang="en-US" smtClean="0"/>
-              <a:t>2022/1/7</a:t>
+              <a:t>2025/5/9</a:t>
             </a:fld>
             <a:endParaRPr lang="zh-TW" altLang="en-US"/>
           </a:p>
@@ -2330,7 +2330,7 @@
           </a:lstStyle>
           <a:p>
             <a:r>
-              <a:rPr lang="en-US" altLang="zh-TW" smtClean="0"/>
+              <a:rPr lang="en-US" altLang="zh-TW"/>
               <a:t>Click to edit Master title style</a:t>
             </a:r>
             <a:endParaRPr lang="zh-TW" altLang="en-US"/>
@@ -2395,7 +2395,7 @@
           </a:lstStyle>
           <a:p>
             <a:r>
-              <a:rPr lang="en-US" altLang="zh-TW" smtClean="0"/>
+              <a:rPr lang="en-US" altLang="zh-TW"/>
               <a:t>Click icon to add picture</a:t>
             </a:r>
             <a:endParaRPr lang="zh-TW" altLang="en-US"/>
@@ -2461,7 +2461,7 @@
           <a:p>
             <a:pPr lvl="0"/>
             <a:r>
-              <a:rPr lang="en-US" altLang="zh-TW" smtClean="0"/>
+              <a:rPr lang="en-US" altLang="zh-TW"/>
               <a:t>Click to edit Master text styles</a:t>
             </a:r>
           </a:p>
@@ -2484,7 +2484,7 @@
           <a:p>
             <a:fld id="{90650502-3618-4BDE-8B7B-6341F82301FD}" type="datetimeFigureOut">
               <a:rPr lang="zh-TW" altLang="en-US" smtClean="0"/>
-              <a:t>2022/1/7</a:t>
+              <a:t>2025/5/9</a:t>
             </a:fld>
             <a:endParaRPr lang="zh-TW" altLang="en-US"/>
           </a:p>
@@ -2593,10 +2593,9 @@
           <a:lstStyle/>
           <a:p>
             <a:r>
-              <a:rPr lang="zh-TW" altLang="en-US" smtClean="0"/>
+              <a:rPr lang="zh-TW" altLang="en-US"/>
               <a:t>按一下以編輯母片標題樣式</a:t>
             </a:r>
-            <a:endParaRPr lang="zh-TW" altLang="en-US"/>
           </a:p>
         </p:txBody>
       </p:sp>
@@ -2627,38 +2626,37 @@
           <a:p>
             <a:pPr lvl="0"/>
             <a:r>
-              <a:rPr lang="zh-TW" altLang="en-US" smtClean="0"/>
+              <a:rPr lang="zh-TW" altLang="en-US"/>
               <a:t>按一下以編輯母片文字樣式</a:t>
             </a:r>
           </a:p>
           <a:p>
             <a:pPr lvl="1"/>
             <a:r>
-              <a:rPr lang="zh-TW" altLang="en-US" smtClean="0"/>
+              <a:rPr lang="zh-TW" altLang="en-US"/>
               <a:t>第二層</a:t>
             </a:r>
           </a:p>
           <a:p>
             <a:pPr lvl="2"/>
             <a:r>
-              <a:rPr lang="zh-TW" altLang="en-US" smtClean="0"/>
+              <a:rPr lang="zh-TW" altLang="en-US"/>
               <a:t>第三層</a:t>
             </a:r>
           </a:p>
           <a:p>
             <a:pPr lvl="3"/>
             <a:r>
-              <a:rPr lang="zh-TW" altLang="en-US" smtClean="0"/>
+              <a:rPr lang="zh-TW" altLang="en-US"/>
               <a:t>第四層</a:t>
             </a:r>
           </a:p>
           <a:p>
             <a:pPr lvl="4"/>
             <a:r>
-              <a:rPr lang="zh-TW" altLang="en-US" smtClean="0"/>
+              <a:rPr lang="zh-TW" altLang="en-US"/>
               <a:t>第五層</a:t>
             </a:r>
-            <a:endParaRPr lang="zh-TW" altLang="en-US"/>
           </a:p>
         </p:txBody>
       </p:sp>
@@ -2697,7 +2695,7 @@
           <a:p>
             <a:fld id="{90650502-3618-4BDE-8B7B-6341F82301FD}" type="datetimeFigureOut">
               <a:rPr lang="zh-TW" altLang="en-US" smtClean="0"/>
-              <a:t>2022/1/7</a:t>
+              <a:t>2025/5/9</a:t>
             </a:fld>
             <a:endParaRPr lang="zh-TW" altLang="en-US"/>
           </a:p>
@@ -3090,7 +3088,7 @@
           <a:lstStyle/>
           <a:p>
             <a:r>
-              <a:rPr lang="zh-TW" altLang="en-US" sz="5400" b="1" i="1" dirty="0" smtClean="0">
+              <a:rPr lang="zh-TW" altLang="en-US" sz="5400" b="1" i="1" dirty="0">
                 <a:solidFill>
                   <a:srgbClr val="000066"/>
                 </a:solidFill>
@@ -3104,24 +3102,7 @@
                 <a:latin typeface="微軟正黑體" pitchFamily="34" charset="-120"/>
                 <a:ea typeface="微軟正黑體" pitchFamily="34" charset="-120"/>
               </a:rPr>
-              <a:t>靠</a:t>
-            </a:r>
-            <a:r>
-              <a:rPr lang="zh-TW" altLang="en-US" sz="5400" b="1" i="1" dirty="0">
-                <a:solidFill>
-                  <a:srgbClr val="000066"/>
-                </a:solidFill>
-                <a:effectLst>
-                  <a:outerShdw blurRad="38100" dist="38100" dir="2700000" algn="tl">
-                    <a:srgbClr val="000000">
-                      <a:alpha val="43137"/>
-                    </a:srgbClr>
-                  </a:outerShdw>
-                </a:effectLst>
-                <a:latin typeface="微軟正黑體" pitchFamily="34" charset="-120"/>
-                <a:ea typeface="微軟正黑體" pitchFamily="34" charset="-120"/>
-              </a:rPr>
-              <a:t>著耶穌得勝</a:t>
+              <a:t>靠著耶穌得勝</a:t>
             </a:r>
           </a:p>
         </p:txBody>
@@ -3182,7 +3163,7 @@
               <a:buNone/>
             </a:pPr>
             <a:r>
-              <a:rPr lang="zh-TW" altLang="en-US" sz="4800" b="1" dirty="0" smtClean="0">
+              <a:rPr lang="zh-TW" altLang="en-US" sz="4800" b="1" dirty="0">
                 <a:solidFill>
                   <a:srgbClr val="000066"/>
                 </a:solidFill>
@@ -3192,34 +3173,24 @@
               <a:t>在</a:t>
             </a:r>
             <a:r>
-              <a:rPr lang="zh-CN" altLang="en-US" sz="4800" b="1" dirty="0" smtClean="0">
+              <a:rPr lang="zh-CN" altLang="en-US" sz="4800" b="1" dirty="0">
                 <a:solidFill>
                   <a:srgbClr val="000066"/>
                 </a:solidFill>
                 <a:latin typeface="微軟正黑體" pitchFamily="34" charset="-120"/>
                 <a:ea typeface="微軟正黑體" pitchFamily="34" charset="-120"/>
               </a:rPr>
-              <a:t>袮</a:t>
-            </a:r>
-            <a:r>
-              <a:rPr lang="zh-TW" altLang="en-US" sz="4800" b="1" dirty="0" smtClean="0">
+              <a:t>祢</a:t>
+            </a:r>
+            <a:r>
+              <a:rPr lang="zh-TW" altLang="en-US" sz="4800" b="1" dirty="0">
                 <a:solidFill>
                   <a:srgbClr val="000066"/>
                 </a:solidFill>
                 <a:latin typeface="微軟正黑體" pitchFamily="34" charset="-120"/>
                 <a:ea typeface="微軟正黑體" pitchFamily="34" charset="-120"/>
               </a:rPr>
-              <a:t>愛</a:t>
-            </a:r>
-            <a:r>
-              <a:rPr lang="zh-TW" altLang="en-US" sz="4800" b="1" dirty="0">
-                <a:solidFill>
-                  <a:srgbClr val="000066"/>
-                </a:solidFill>
-                <a:latin typeface="微軟正黑體" pitchFamily="34" charset="-120"/>
-                <a:ea typeface="微軟正黑體" pitchFamily="34" charset="-120"/>
-              </a:rPr>
-              <a:t>裡我要宣告</a:t>
+              <a:t>愛裡我要宣告</a:t>
             </a:r>
             <a:endParaRPr lang="en-US" altLang="zh-TW" sz="4800" b="1" dirty="0">
               <a:solidFill>
@@ -3262,7 +3233,7 @@
         <p:spPr>
           <a:xfrm>
             <a:off x="0" y="3939903"/>
-            <a:ext cx="9143999" cy="646331"/>
+            <a:ext cx="9143999" cy="523220"/>
           </a:xfrm>
           <a:prstGeom prst="rect">
             <a:avLst/>
@@ -3277,7 +3248,7 @@
           <a:p>
             <a:pPr algn="ctr"/>
             <a:r>
-              <a:rPr lang="en-US" altLang="zh-TW" sz="3600" b="1" dirty="0" smtClean="0">
+              <a:rPr lang="en-US" altLang="zh-TW" sz="2800" b="1" dirty="0">
                 <a:solidFill>
                   <a:srgbClr val="000066"/>
                 </a:solidFill>
@@ -3288,7 +3259,7 @@
               <a:t>( </a:t>
             </a:r>
             <a:r>
-              <a:rPr lang="zh-CN" altLang="en-US" sz="3600" b="1" dirty="0" smtClean="0">
+              <a:rPr lang="zh-CN" altLang="en-US" sz="2800" b="1" dirty="0">
                 <a:solidFill>
                   <a:srgbClr val="000066"/>
                 </a:solidFill>
@@ -3296,10 +3267,10 @@
                 <a:latin typeface="Microsoft JhengHei" panose="020B0604030504040204" pitchFamily="34" charset="-120"/>
                 <a:ea typeface="Microsoft JhengHei" panose="020B0604030504040204" pitchFamily="34" charset="-120"/>
               </a:rPr>
-              <a:t>正 </a:t>
-            </a:r>
-            <a:r>
-              <a:rPr lang="en-US" altLang="zh-TW" sz="3600" b="1" dirty="0" smtClean="0">
+              <a:t>正歌 </a:t>
+            </a:r>
+            <a:r>
+              <a:rPr lang="en-US" altLang="zh-TW" sz="2800" b="1" dirty="0">
                 <a:solidFill>
                   <a:srgbClr val="000066"/>
                 </a:solidFill>
@@ -3309,7 +3280,7 @@
               </a:rPr>
               <a:t>)</a:t>
             </a:r>
-            <a:endParaRPr lang="vi-VN" sz="3600" b="1" dirty="0">
+            <a:endParaRPr lang="vi-VN" sz="2800" b="1" dirty="0">
               <a:solidFill>
                 <a:srgbClr val="000066"/>
               </a:solidFill>
@@ -3376,7 +3347,7 @@
               <a:buNone/>
             </a:pPr>
             <a:r>
-              <a:rPr lang="zh-TW" altLang="en-US" sz="4800" b="1" dirty="0" smtClean="0">
+              <a:rPr lang="zh-TW" altLang="en-US" sz="4800" b="1" dirty="0">
                 <a:solidFill>
                   <a:srgbClr val="000066"/>
                 </a:solidFill>
@@ -3393,67 +3364,49 @@
                 <a:latin typeface="微軟正黑體" pitchFamily="34" charset="-120"/>
                 <a:ea typeface="微軟正黑體" pitchFamily="34" charset="-120"/>
               </a:rPr>
-              <a:t>袮</a:t>
-            </a:r>
-            <a:r>
-              <a:rPr lang="zh-TW" altLang="en-US" sz="4800" b="1" dirty="0" smtClean="0">
+              <a:t>祢</a:t>
+            </a:r>
+            <a:r>
+              <a:rPr lang="zh-TW" altLang="en-US" sz="4800" b="1" dirty="0">
                 <a:solidFill>
                   <a:srgbClr val="000066"/>
                 </a:solidFill>
                 <a:latin typeface="微軟正黑體" pitchFamily="34" charset="-120"/>
                 <a:ea typeface="微軟正黑體" pitchFamily="34" charset="-120"/>
               </a:rPr>
-              <a:t>愛</a:t>
-            </a:r>
-            <a:r>
-              <a:rPr lang="zh-TW" altLang="en-US" sz="4800" b="1" dirty="0">
+              <a:t>愛裡我要宣告</a:t>
+            </a:r>
+            <a:endParaRPr lang="en-US" altLang="zh-TW" sz="4800" b="1" dirty="0">
+              <a:solidFill>
+                <a:srgbClr val="000066"/>
+              </a:solidFill>
+              <a:latin typeface="微軟正黑體" pitchFamily="34" charset="-120"/>
+              <a:ea typeface="微軟正黑體" pitchFamily="34" charset="-120"/>
+            </a:endParaRPr>
+          </a:p>
+          <a:p>
+            <a:pPr algn="ctr">
+              <a:buNone/>
+            </a:pPr>
+            <a:r>
+              <a:rPr lang="zh-CN" altLang="en-US" sz="4800" b="1" dirty="0">
                 <a:solidFill>
                   <a:srgbClr val="000066"/>
                 </a:solidFill>
                 <a:latin typeface="微軟正黑體" pitchFamily="34" charset="-120"/>
                 <a:ea typeface="微軟正黑體" pitchFamily="34" charset="-120"/>
               </a:rPr>
-              <a:t>裡我要宣</a:t>
-            </a:r>
-            <a:r>
-              <a:rPr lang="zh-TW" altLang="en-US" sz="4800" b="1" dirty="0" smtClean="0">
+              <a:t>祢</a:t>
+            </a:r>
+            <a:r>
+              <a:rPr lang="zh-TW" altLang="en-US" sz="4800" b="1" dirty="0">
                 <a:solidFill>
                   <a:srgbClr val="000066"/>
                 </a:solidFill>
                 <a:latin typeface="微軟正黑體" pitchFamily="34" charset="-120"/>
                 <a:ea typeface="微軟正黑體" pitchFamily="34" charset="-120"/>
               </a:rPr>
-              <a:t>告   </a:t>
-            </a:r>
-            <a:r>
-              <a:rPr lang="zh-CN" altLang="en-US" sz="4800" b="1" dirty="0" smtClean="0">
-                <a:solidFill>
-                  <a:srgbClr val="000066"/>
-                </a:solidFill>
-                <a:latin typeface="微軟正黑體" pitchFamily="34" charset="-120"/>
-                <a:ea typeface="微軟正黑體" pitchFamily="34" charset="-120"/>
-              </a:rPr>
-              <a:t>袮</a:t>
-            </a:r>
-            <a:r>
-              <a:rPr lang="zh-TW" altLang="en-US" sz="4800" b="1" dirty="0" smtClean="0">
-                <a:solidFill>
-                  <a:srgbClr val="000066"/>
-                </a:solidFill>
-                <a:latin typeface="微軟正黑體" pitchFamily="34" charset="-120"/>
-                <a:ea typeface="微軟正黑體" pitchFamily="34" charset="-120"/>
-              </a:rPr>
-              <a:t>是</a:t>
-            </a:r>
-            <a:r>
-              <a:rPr lang="zh-TW" altLang="en-US" sz="4800" b="1" dirty="0">
-                <a:solidFill>
-                  <a:srgbClr val="000066"/>
-                </a:solidFill>
-                <a:latin typeface="微軟正黑體" pitchFamily="34" charset="-120"/>
-                <a:ea typeface="微軟正黑體" pitchFamily="34" charset="-120"/>
-              </a:rPr>
-              <a:t>王</a:t>
+              <a:t>是王</a:t>
             </a:r>
           </a:p>
         </p:txBody>
@@ -3467,7 +3420,7 @@
         <p:spPr>
           <a:xfrm>
             <a:off x="0" y="3939903"/>
-            <a:ext cx="9143999" cy="646331"/>
+            <a:ext cx="9143999" cy="523220"/>
           </a:xfrm>
           <a:prstGeom prst="rect">
             <a:avLst/>
@@ -3482,44 +3435,39 @@
           <a:p>
             <a:pPr algn="ctr"/>
             <a:r>
-              <a:rPr lang="en-US" altLang="zh-TW" sz="3600" b="1" dirty="0" smtClean="0">
-                <a:solidFill>
-                  <a:srgbClr val="000066"/>
-                </a:solidFill>
-                <a:effectLst/>
+              <a:rPr lang="en-US" altLang="zh-TW" sz="2800" b="1" dirty="0">
+                <a:solidFill>
+                  <a:srgbClr val="000066"/>
+                </a:solidFill>
                 <a:latin typeface="Microsoft JhengHei" panose="020B0604030504040204" pitchFamily="34" charset="-120"/>
                 <a:ea typeface="Microsoft JhengHei" panose="020B0604030504040204" pitchFamily="34" charset="-120"/>
               </a:rPr>
               <a:t>( </a:t>
             </a:r>
             <a:r>
-              <a:rPr lang="zh-CN" altLang="en-US" sz="3600" b="1" dirty="0" smtClean="0">
-                <a:solidFill>
-                  <a:srgbClr val="000066"/>
-                </a:solidFill>
-                <a:effectLst/>
+              <a:rPr lang="zh-CN" altLang="en-US" sz="2800" b="1" dirty="0">
+                <a:solidFill>
+                  <a:srgbClr val="000066"/>
+                </a:solidFill>
                 <a:latin typeface="Microsoft JhengHei" panose="020B0604030504040204" pitchFamily="34" charset="-120"/>
                 <a:ea typeface="Microsoft JhengHei" panose="020B0604030504040204" pitchFamily="34" charset="-120"/>
               </a:rPr>
-              <a:t>正 </a:t>
-            </a:r>
-            <a:r>
-              <a:rPr lang="en-US" altLang="zh-TW" sz="3600" b="1" dirty="0" smtClean="0">
-                <a:solidFill>
-                  <a:srgbClr val="000066"/>
-                </a:solidFill>
-                <a:effectLst/>
+              <a:t>正歌 </a:t>
+            </a:r>
+            <a:r>
+              <a:rPr lang="en-US" altLang="zh-TW" sz="2800" b="1" dirty="0">
+                <a:solidFill>
+                  <a:srgbClr val="000066"/>
+                </a:solidFill>
                 <a:latin typeface="Microsoft JhengHei" panose="020B0604030504040204" pitchFamily="34" charset="-120"/>
                 <a:ea typeface="Microsoft JhengHei" panose="020B0604030504040204" pitchFamily="34" charset="-120"/>
               </a:rPr>
               <a:t>)</a:t>
             </a:r>
-            <a:endParaRPr lang="vi-VN" sz="3600" b="1" dirty="0">
+            <a:endParaRPr lang="vi-VN" sz="2800" b="1" dirty="0">
               <a:solidFill>
                 <a:srgbClr val="000066"/>
               </a:solidFill>
-              <a:effectLst/>
-              <a:latin typeface="Microsoft JhengHei" panose="020B0604030504040204" pitchFamily="34" charset="-120"/>
               <a:ea typeface="Microsoft JhengHei" panose="020B0604030504040204" pitchFamily="34" charset="-120"/>
             </a:endParaRPr>
           </a:p>
@@ -3581,7 +3529,7 @@
               <a:buNone/>
             </a:pPr>
             <a:r>
-              <a:rPr lang="zh-TW" altLang="en-US" sz="4800" b="1" dirty="0" smtClean="0">
+              <a:rPr lang="zh-TW" altLang="en-US" sz="4800" b="1" dirty="0">
                 <a:solidFill>
                   <a:srgbClr val="000066"/>
                 </a:solidFill>
@@ -3598,18 +3546,23 @@
                 <a:latin typeface="微軟正黑體" pitchFamily="34" charset="-120"/>
                 <a:ea typeface="微軟正黑體" pitchFamily="34" charset="-120"/>
               </a:rPr>
-              <a:t>袮</a:t>
-            </a:r>
-            <a:r>
-              <a:rPr lang="zh-TW" altLang="en-US" sz="4800" b="1" dirty="0" smtClean="0">
+              <a:t>祢</a:t>
+            </a:r>
+            <a:r>
+              <a:rPr lang="zh-TW" altLang="en-US" sz="4800" b="1" dirty="0">
                 <a:solidFill>
                   <a:srgbClr val="000066"/>
                 </a:solidFill>
                 <a:latin typeface="微軟正黑體" pitchFamily="34" charset="-120"/>
                 <a:ea typeface="微軟正黑體" pitchFamily="34" charset="-120"/>
               </a:rPr>
-              <a:t>愛</a:t>
-            </a:r>
+              <a:t>愛裡我要宣告</a:t>
+            </a:r>
+          </a:p>
+          <a:p>
+            <a:pPr algn="ctr">
+              <a:buNone/>
+            </a:pPr>
             <a:r>
               <a:rPr lang="zh-TW" altLang="en-US" sz="4800" b="1" dirty="0">
                 <a:solidFill>
@@ -3618,40 +3571,8 @@
                 <a:latin typeface="微軟正黑體" pitchFamily="34" charset="-120"/>
                 <a:ea typeface="微軟正黑體" pitchFamily="34" charset="-120"/>
               </a:rPr>
-              <a:t>裡我要宣</a:t>
-            </a:r>
-            <a:r>
-              <a:rPr lang="zh-TW" altLang="en-US" sz="4800" b="1" dirty="0">
-                <a:solidFill>
-                  <a:srgbClr val="000066"/>
-                </a:solidFill>
-                <a:latin typeface="微軟正黑體" pitchFamily="34" charset="-120"/>
-                <a:ea typeface="微軟正黑體" pitchFamily="34" charset="-120"/>
-              </a:rPr>
-              <a:t>告</a:t>
-            </a:r>
-          </a:p>
-          <a:p>
-            <a:pPr algn="ctr">
-              <a:buNone/>
-            </a:pPr>
-            <a:r>
-              <a:rPr lang="zh-TW" altLang="en-US" sz="4800" b="1" dirty="0">
-                <a:solidFill>
-                  <a:srgbClr val="000066"/>
-                </a:solidFill>
-                <a:latin typeface="微軟正黑體" pitchFamily="34" charset="-120"/>
-                <a:ea typeface="微軟正黑體" pitchFamily="34" charset="-120"/>
-              </a:rPr>
               <a:t>我不必罪中打轉</a:t>
             </a:r>
-            <a:endParaRPr lang="zh-TW" altLang="en-US" sz="4800" b="1" dirty="0">
-              <a:solidFill>
-                <a:srgbClr val="000066"/>
-              </a:solidFill>
-              <a:latin typeface="微軟正黑體" pitchFamily="34" charset="-120"/>
-              <a:ea typeface="微軟正黑體" pitchFamily="34" charset="-120"/>
-            </a:endParaRPr>
           </a:p>
         </p:txBody>
       </p:sp>
@@ -3664,7 +3585,7 @@
         <p:spPr>
           <a:xfrm>
             <a:off x="0" y="3939903"/>
-            <a:ext cx="9143999" cy="646331"/>
+            <a:ext cx="9143999" cy="523220"/>
           </a:xfrm>
           <a:prstGeom prst="rect">
             <a:avLst/>
@@ -3679,44 +3600,39 @@
           <a:p>
             <a:pPr algn="ctr"/>
             <a:r>
-              <a:rPr lang="en-US" altLang="zh-TW" sz="3600" b="1" dirty="0" smtClean="0">
-                <a:solidFill>
-                  <a:srgbClr val="000066"/>
-                </a:solidFill>
-                <a:effectLst/>
+              <a:rPr lang="en-US" altLang="zh-TW" sz="2800" b="1" dirty="0">
+                <a:solidFill>
+                  <a:srgbClr val="000066"/>
+                </a:solidFill>
                 <a:latin typeface="Microsoft JhengHei" panose="020B0604030504040204" pitchFamily="34" charset="-120"/>
                 <a:ea typeface="Microsoft JhengHei" panose="020B0604030504040204" pitchFamily="34" charset="-120"/>
               </a:rPr>
               <a:t>( </a:t>
             </a:r>
             <a:r>
-              <a:rPr lang="zh-CN" altLang="en-US" sz="3600" b="1" dirty="0" smtClean="0">
-                <a:solidFill>
-                  <a:srgbClr val="000066"/>
-                </a:solidFill>
-                <a:effectLst/>
+              <a:rPr lang="zh-CN" altLang="en-US" sz="2800" b="1" dirty="0">
+                <a:solidFill>
+                  <a:srgbClr val="000066"/>
+                </a:solidFill>
                 <a:latin typeface="Microsoft JhengHei" panose="020B0604030504040204" pitchFamily="34" charset="-120"/>
                 <a:ea typeface="Microsoft JhengHei" panose="020B0604030504040204" pitchFamily="34" charset="-120"/>
               </a:rPr>
-              <a:t>正 </a:t>
-            </a:r>
-            <a:r>
-              <a:rPr lang="en-US" altLang="zh-TW" sz="3600" b="1" dirty="0" smtClean="0">
-                <a:solidFill>
-                  <a:srgbClr val="000066"/>
-                </a:solidFill>
-                <a:effectLst/>
+              <a:t>正歌 </a:t>
+            </a:r>
+            <a:r>
+              <a:rPr lang="en-US" altLang="zh-TW" sz="2800" b="1" dirty="0">
+                <a:solidFill>
+                  <a:srgbClr val="000066"/>
+                </a:solidFill>
                 <a:latin typeface="Microsoft JhengHei" panose="020B0604030504040204" pitchFamily="34" charset="-120"/>
                 <a:ea typeface="Microsoft JhengHei" panose="020B0604030504040204" pitchFamily="34" charset="-120"/>
               </a:rPr>
               <a:t>)</a:t>
             </a:r>
-            <a:endParaRPr lang="vi-VN" sz="3600" b="1" dirty="0">
+            <a:endParaRPr lang="vi-VN" sz="2800" b="1" dirty="0">
               <a:solidFill>
                 <a:srgbClr val="000066"/>
               </a:solidFill>
-              <a:effectLst/>
-              <a:latin typeface="Microsoft JhengHei" panose="020B0604030504040204" pitchFamily="34" charset="-120"/>
               <a:ea typeface="Microsoft JhengHei" panose="020B0604030504040204" pitchFamily="34" charset="-120"/>
             </a:endParaRPr>
           </a:p>
@@ -3778,7 +3694,7 @@
               <a:buNone/>
             </a:pPr>
             <a:r>
-              <a:rPr lang="zh-TW" altLang="en-US" sz="4800" b="1" dirty="0" smtClean="0">
+              <a:rPr lang="zh-TW" altLang="en-US" sz="4800" b="1" dirty="0">
                 <a:solidFill>
                   <a:srgbClr val="000066"/>
                 </a:solidFill>
@@ -3795,27 +3711,17 @@
                 <a:latin typeface="微軟正黑體" pitchFamily="34" charset="-120"/>
                 <a:ea typeface="微軟正黑體" pitchFamily="34" charset="-120"/>
               </a:rPr>
-              <a:t>袮</a:t>
-            </a:r>
-            <a:r>
-              <a:rPr lang="zh-TW" altLang="en-US" sz="4800" b="1" dirty="0" smtClean="0">
+              <a:t>祢</a:t>
+            </a:r>
+            <a:r>
+              <a:rPr lang="zh-TW" altLang="en-US" sz="4800" b="1" dirty="0">
                 <a:solidFill>
                   <a:srgbClr val="000066"/>
                 </a:solidFill>
                 <a:latin typeface="微軟正黑體" pitchFamily="34" charset="-120"/>
                 <a:ea typeface="微軟正黑體" pitchFamily="34" charset="-120"/>
               </a:rPr>
-              <a:t>帶</a:t>
-            </a:r>
-            <a:r>
-              <a:rPr lang="zh-TW" altLang="en-US" sz="4800" b="1" dirty="0">
-                <a:solidFill>
-                  <a:srgbClr val="000066"/>
-                </a:solidFill>
-                <a:latin typeface="微軟正黑體" pitchFamily="34" charset="-120"/>
-                <a:ea typeface="微軟正黑體" pitchFamily="34" charset="-120"/>
-              </a:rPr>
-              <a:t>領著我得勝</a:t>
+              <a:t>帶領著我得勝</a:t>
             </a:r>
           </a:p>
         </p:txBody>
@@ -3829,7 +3735,7 @@
         <p:spPr>
           <a:xfrm>
             <a:off x="0" y="3939903"/>
-            <a:ext cx="9143999" cy="646331"/>
+            <a:ext cx="9143999" cy="523220"/>
           </a:xfrm>
           <a:prstGeom prst="rect">
             <a:avLst/>
@@ -3844,44 +3750,39 @@
           <a:p>
             <a:pPr algn="ctr"/>
             <a:r>
-              <a:rPr lang="en-US" altLang="zh-TW" sz="3600" b="1" dirty="0" smtClean="0">
-                <a:solidFill>
-                  <a:srgbClr val="000066"/>
-                </a:solidFill>
-                <a:effectLst/>
+              <a:rPr lang="en-US" altLang="zh-TW" sz="2800" b="1" dirty="0">
+                <a:solidFill>
+                  <a:srgbClr val="000066"/>
+                </a:solidFill>
                 <a:latin typeface="Microsoft JhengHei" panose="020B0604030504040204" pitchFamily="34" charset="-120"/>
                 <a:ea typeface="Microsoft JhengHei" panose="020B0604030504040204" pitchFamily="34" charset="-120"/>
               </a:rPr>
               <a:t>( </a:t>
             </a:r>
             <a:r>
-              <a:rPr lang="zh-CN" altLang="en-US" sz="3600" b="1" dirty="0" smtClean="0">
-                <a:solidFill>
-                  <a:srgbClr val="000066"/>
-                </a:solidFill>
-                <a:effectLst/>
+              <a:rPr lang="zh-CN" altLang="en-US" sz="2800" b="1" dirty="0">
+                <a:solidFill>
+                  <a:srgbClr val="000066"/>
+                </a:solidFill>
                 <a:latin typeface="Microsoft JhengHei" panose="020B0604030504040204" pitchFamily="34" charset="-120"/>
                 <a:ea typeface="Microsoft JhengHei" panose="020B0604030504040204" pitchFamily="34" charset="-120"/>
               </a:rPr>
-              <a:t>正 </a:t>
-            </a:r>
-            <a:r>
-              <a:rPr lang="en-US" altLang="zh-TW" sz="3600" b="1" dirty="0" smtClean="0">
-                <a:solidFill>
-                  <a:srgbClr val="000066"/>
-                </a:solidFill>
-                <a:effectLst/>
+              <a:t>正歌 </a:t>
+            </a:r>
+            <a:r>
+              <a:rPr lang="en-US" altLang="zh-TW" sz="2800" b="1" dirty="0">
+                <a:solidFill>
+                  <a:srgbClr val="000066"/>
+                </a:solidFill>
                 <a:latin typeface="Microsoft JhengHei" panose="020B0604030504040204" pitchFamily="34" charset="-120"/>
                 <a:ea typeface="Microsoft JhengHei" panose="020B0604030504040204" pitchFamily="34" charset="-120"/>
               </a:rPr>
               <a:t>)</a:t>
             </a:r>
-            <a:endParaRPr lang="vi-VN" sz="3600" b="1" dirty="0">
+            <a:endParaRPr lang="vi-VN" sz="2800" b="1" dirty="0">
               <a:solidFill>
                 <a:srgbClr val="000066"/>
               </a:solidFill>
-              <a:effectLst/>
-              <a:latin typeface="Microsoft JhengHei" panose="020B0604030504040204" pitchFamily="34" charset="-120"/>
               <a:ea typeface="Microsoft JhengHei" panose="020B0604030504040204" pitchFamily="34" charset="-120"/>
             </a:endParaRPr>
           </a:p>
@@ -3950,57 +3851,27 @@
                 <a:latin typeface="微軟正黑體" pitchFamily="34" charset="-120"/>
                 <a:ea typeface="微軟正黑體" pitchFamily="34" charset="-120"/>
               </a:rPr>
-              <a:t>靠著耶穌得</a:t>
-            </a:r>
-            <a:r>
-              <a:rPr lang="zh-TW" altLang="en-US" sz="4800" b="1" dirty="0">
+              <a:t>靠著耶穌得勝</a:t>
+            </a:r>
+            <a:r>
+              <a:rPr lang="en-US" altLang="zh-TW" sz="4800" b="1" dirty="0">
                 <a:solidFill>
                   <a:srgbClr val="000066"/>
                 </a:solidFill>
                 <a:latin typeface="微軟正黑體" pitchFamily="34" charset="-120"/>
                 <a:ea typeface="微軟正黑體" pitchFamily="34" charset="-120"/>
               </a:rPr>
-              <a:t>勝</a:t>
-            </a:r>
-            <a:r>
-              <a:rPr lang="en-US" altLang="zh-TW" sz="4800" b="1" dirty="0">
+              <a:t>  </a:t>
+            </a:r>
+            <a:r>
+              <a:rPr lang="zh-TW" altLang="en-US" sz="4800" b="1" dirty="0">
                 <a:solidFill>
                   <a:srgbClr val="000066"/>
                 </a:solidFill>
                 <a:latin typeface="微軟正黑體" pitchFamily="34" charset="-120"/>
                 <a:ea typeface="微軟正黑體" pitchFamily="34" charset="-120"/>
               </a:rPr>
-              <a:t>  </a:t>
-            </a:r>
-            <a:r>
-              <a:rPr lang="zh-TW" altLang="en-US" sz="4800" b="1" dirty="0">
-                <a:solidFill>
-                  <a:srgbClr val="000066"/>
-                </a:solidFill>
-                <a:latin typeface="微軟正黑體" pitchFamily="34" charset="-120"/>
-                <a:ea typeface="微軟正黑體" pitchFamily="34" charset="-120"/>
-              </a:rPr>
-              <a:t>靠</a:t>
-            </a:r>
-            <a:r>
-              <a:rPr lang="zh-TW" altLang="en-US" sz="4800" b="1" dirty="0">
-                <a:solidFill>
-                  <a:srgbClr val="000066"/>
-                </a:solidFill>
-                <a:latin typeface="微軟正黑體" pitchFamily="34" charset="-120"/>
-                <a:ea typeface="微軟正黑體" pitchFamily="34" charset="-120"/>
-              </a:rPr>
-              <a:t>著耶穌得</a:t>
-            </a:r>
-            <a:r>
-              <a:rPr lang="zh-TW" altLang="en-US" sz="4800" b="1" dirty="0">
-                <a:solidFill>
-                  <a:srgbClr val="000066"/>
-                </a:solidFill>
-                <a:latin typeface="微軟正黑體" pitchFamily="34" charset="-120"/>
-                <a:ea typeface="微軟正黑體" pitchFamily="34" charset="-120"/>
-              </a:rPr>
-              <a:t>勝</a:t>
+              <a:t>靠著耶穌得勝</a:t>
             </a:r>
             <a:endParaRPr lang="en-US" altLang="zh-TW" sz="4800" b="1" dirty="0">
               <a:solidFill>
@@ -4022,25 +3893,8 @@
                 <a:latin typeface="微軟正黑體" pitchFamily="34" charset="-120"/>
                 <a:ea typeface="微軟正黑體" pitchFamily="34" charset="-120"/>
               </a:rPr>
-              <a:t>終此生要靠著主愛去得</a:t>
-            </a:r>
-            <a:r>
-              <a:rPr lang="zh-TW" altLang="en-US" sz="4800" b="1" dirty="0">
-                <a:solidFill>
-                  <a:srgbClr val="000066"/>
-                </a:solidFill>
-                <a:latin typeface="微軟正黑體" pitchFamily="34" charset="-120"/>
-                <a:ea typeface="微軟正黑體" pitchFamily="34" charset="-120"/>
-              </a:rPr>
-              <a:t>勝</a:t>
-            </a:r>
-            <a:endParaRPr lang="zh-TW" altLang="en-US" sz="4800" b="1" dirty="0">
-              <a:solidFill>
-                <a:srgbClr val="000066"/>
-              </a:solidFill>
-              <a:latin typeface="微軟正黑體" pitchFamily="34" charset="-120"/>
-              <a:ea typeface="微軟正黑體" pitchFamily="34" charset="-120"/>
-            </a:endParaRPr>
+              <a:t>終此生要靠著主愛去得勝</a:t>
+            </a:r>
           </a:p>
         </p:txBody>
       </p:sp>
@@ -4053,7 +3907,7 @@
         <p:spPr>
           <a:xfrm>
             <a:off x="0" y="3939903"/>
-            <a:ext cx="9143999" cy="646331"/>
+            <a:ext cx="9143999" cy="523220"/>
           </a:xfrm>
           <a:prstGeom prst="rect">
             <a:avLst/>
@@ -4068,44 +3922,39 @@
           <a:p>
             <a:pPr algn="ctr"/>
             <a:r>
-              <a:rPr lang="en-US" altLang="zh-TW" sz="3600" b="1" dirty="0" smtClean="0">
-                <a:solidFill>
-                  <a:srgbClr val="000066"/>
-                </a:solidFill>
-                <a:effectLst/>
+              <a:rPr lang="en-US" altLang="zh-TW" sz="2800" b="1" dirty="0">
+                <a:solidFill>
+                  <a:srgbClr val="000066"/>
+                </a:solidFill>
                 <a:latin typeface="Microsoft JhengHei" panose="020B0604030504040204" pitchFamily="34" charset="-120"/>
                 <a:ea typeface="Microsoft JhengHei" panose="020B0604030504040204" pitchFamily="34" charset="-120"/>
               </a:rPr>
               <a:t>( </a:t>
             </a:r>
             <a:r>
-              <a:rPr lang="zh-CN" altLang="en-US" sz="3600" b="1" dirty="0" smtClean="0">
-                <a:solidFill>
-                  <a:srgbClr val="000066"/>
-                </a:solidFill>
-                <a:effectLst/>
+              <a:rPr lang="zh-CN" altLang="en-US" sz="2800" b="1" dirty="0">
+                <a:solidFill>
+                  <a:srgbClr val="000066"/>
+                </a:solidFill>
                 <a:latin typeface="Microsoft JhengHei" panose="020B0604030504040204" pitchFamily="34" charset="-120"/>
                 <a:ea typeface="Microsoft JhengHei" panose="020B0604030504040204" pitchFamily="34" charset="-120"/>
               </a:rPr>
-              <a:t>副 </a:t>
-            </a:r>
-            <a:r>
-              <a:rPr lang="en-US" altLang="zh-TW" sz="3600" b="1" dirty="0" smtClean="0">
-                <a:solidFill>
-                  <a:srgbClr val="000066"/>
-                </a:solidFill>
-                <a:effectLst/>
+              <a:t>副歌 </a:t>
+            </a:r>
+            <a:r>
+              <a:rPr lang="en-US" altLang="zh-TW" sz="2800" b="1" dirty="0">
+                <a:solidFill>
+                  <a:srgbClr val="000066"/>
+                </a:solidFill>
                 <a:latin typeface="Microsoft JhengHei" panose="020B0604030504040204" pitchFamily="34" charset="-120"/>
                 <a:ea typeface="Microsoft JhengHei" panose="020B0604030504040204" pitchFamily="34" charset="-120"/>
               </a:rPr>
               <a:t>)</a:t>
             </a:r>
-            <a:endParaRPr lang="vi-VN" sz="3600" b="1" dirty="0">
+            <a:endParaRPr lang="vi-VN" sz="2800" b="1" dirty="0">
               <a:solidFill>
                 <a:srgbClr val="000066"/>
               </a:solidFill>
-              <a:effectLst/>
-              <a:latin typeface="Microsoft JhengHei" panose="020B0604030504040204" pitchFamily="34" charset="-120"/>
               <a:ea typeface="Microsoft JhengHei" panose="020B0604030504040204" pitchFamily="34" charset="-120"/>
             </a:endParaRPr>
           </a:p>
@@ -4209,47 +4058,27 @@
                 <a:latin typeface="微軟正黑體" pitchFamily="34" charset="-120"/>
                 <a:ea typeface="微軟正黑體" pitchFamily="34" charset="-120"/>
               </a:rPr>
-              <a:t>不必驚怕挫</a:t>
-            </a:r>
-            <a:r>
-              <a:rPr lang="zh-TW" altLang="en-US" sz="4800" b="1" dirty="0">
+              <a:t>不必驚怕挫敗</a:t>
+            </a:r>
+            <a:r>
+              <a:rPr lang="en-US" altLang="zh-TW" sz="4800" b="1" dirty="0">
                 <a:solidFill>
                   <a:srgbClr val="000066"/>
                 </a:solidFill>
                 <a:latin typeface="微軟正黑體" pitchFamily="34" charset="-120"/>
                 <a:ea typeface="微軟正黑體" pitchFamily="34" charset="-120"/>
               </a:rPr>
-              <a:t>敗</a:t>
-            </a:r>
-            <a:r>
-              <a:rPr lang="en-US" altLang="zh-TW" sz="4800" b="1" dirty="0">
+              <a:t>  </a:t>
+            </a:r>
+            <a:r>
+              <a:rPr lang="zh-TW" altLang="en-US" sz="4800" b="1" dirty="0">
                 <a:solidFill>
                   <a:srgbClr val="000066"/>
                 </a:solidFill>
                 <a:latin typeface="微軟正黑體" pitchFamily="34" charset="-120"/>
                 <a:ea typeface="微軟正黑體" pitchFamily="34" charset="-120"/>
               </a:rPr>
-              <a:t>  </a:t>
-            </a:r>
-            <a:r>
-              <a:rPr lang="zh-TW" altLang="en-US" sz="4800" b="1" dirty="0">
-                <a:solidFill>
-                  <a:srgbClr val="000066"/>
-                </a:solidFill>
-                <a:latin typeface="微軟正黑體" pitchFamily="34" charset="-120"/>
-                <a:ea typeface="微軟正黑體" pitchFamily="34" charset="-120"/>
-              </a:rPr>
-              <a:t>確</a:t>
-            </a:r>
-            <a:r>
-              <a:rPr lang="zh-TW" altLang="en-US" sz="4800" b="1" dirty="0">
-                <a:solidFill>
-                  <a:srgbClr val="000066"/>
-                </a:solidFill>
-                <a:latin typeface="微軟正黑體" pitchFamily="34" charset="-120"/>
-                <a:ea typeface="微軟正黑體" pitchFamily="34" charset="-120"/>
-              </a:rPr>
-              <a:t>知主恩更廣闊</a:t>
+              <a:t>確知主恩更廣闊</a:t>
             </a:r>
           </a:p>
         </p:txBody>
@@ -4263,7 +4092,7 @@
         <p:spPr>
           <a:xfrm>
             <a:off x="0" y="3939903"/>
-            <a:ext cx="9143999" cy="646331"/>
+            <a:ext cx="9143999" cy="523220"/>
           </a:xfrm>
           <a:prstGeom prst="rect">
             <a:avLst/>
@@ -4278,44 +4107,39 @@
           <a:p>
             <a:pPr algn="ctr"/>
             <a:r>
-              <a:rPr lang="en-US" altLang="zh-TW" sz="3600" b="1" dirty="0" smtClean="0">
-                <a:solidFill>
-                  <a:srgbClr val="000066"/>
-                </a:solidFill>
-                <a:effectLst/>
+              <a:rPr lang="en-US" altLang="zh-TW" sz="2800" b="1" dirty="0">
+                <a:solidFill>
+                  <a:srgbClr val="000066"/>
+                </a:solidFill>
                 <a:latin typeface="Microsoft JhengHei" panose="020B0604030504040204" pitchFamily="34" charset="-120"/>
                 <a:ea typeface="Microsoft JhengHei" panose="020B0604030504040204" pitchFamily="34" charset="-120"/>
               </a:rPr>
               <a:t>( </a:t>
             </a:r>
             <a:r>
-              <a:rPr lang="zh-CN" altLang="en-US" sz="3600" b="1" dirty="0" smtClean="0">
-                <a:solidFill>
-                  <a:srgbClr val="000066"/>
-                </a:solidFill>
-                <a:effectLst/>
+              <a:rPr lang="zh-CN" altLang="en-US" sz="2800" b="1" dirty="0">
+                <a:solidFill>
+                  <a:srgbClr val="000066"/>
+                </a:solidFill>
                 <a:latin typeface="Microsoft JhengHei" panose="020B0604030504040204" pitchFamily="34" charset="-120"/>
                 <a:ea typeface="Microsoft JhengHei" panose="020B0604030504040204" pitchFamily="34" charset="-120"/>
               </a:rPr>
-              <a:t>副 </a:t>
-            </a:r>
-            <a:r>
-              <a:rPr lang="en-US" altLang="zh-TW" sz="3600" b="1" dirty="0" smtClean="0">
-                <a:solidFill>
-                  <a:srgbClr val="000066"/>
-                </a:solidFill>
-                <a:effectLst/>
+              <a:t>副歌 </a:t>
+            </a:r>
+            <a:r>
+              <a:rPr lang="en-US" altLang="zh-TW" sz="2800" b="1" dirty="0">
+                <a:solidFill>
+                  <a:srgbClr val="000066"/>
+                </a:solidFill>
                 <a:latin typeface="Microsoft JhengHei" panose="020B0604030504040204" pitchFamily="34" charset="-120"/>
                 <a:ea typeface="Microsoft JhengHei" panose="020B0604030504040204" pitchFamily="34" charset="-120"/>
               </a:rPr>
               <a:t>)</a:t>
             </a:r>
-            <a:endParaRPr lang="vi-VN" sz="3600" b="1" dirty="0">
+            <a:endParaRPr lang="vi-VN" sz="2800" b="1" dirty="0">
               <a:solidFill>
                 <a:srgbClr val="000066"/>
               </a:solidFill>
-              <a:effectLst/>
-              <a:latin typeface="Microsoft JhengHei" panose="020B0604030504040204" pitchFamily="34" charset="-120"/>
               <a:ea typeface="Microsoft JhengHei" panose="020B0604030504040204" pitchFamily="34" charset="-120"/>
             </a:endParaRPr>
           </a:p>
@@ -4377,7 +4201,7 @@
               <a:buNone/>
             </a:pPr>
             <a:r>
-              <a:rPr lang="zh-TW" altLang="en-US" sz="4800" b="1" dirty="0" smtClean="0">
+              <a:rPr lang="zh-TW" altLang="en-US" sz="4800" b="1" dirty="0">
                 <a:solidFill>
                   <a:srgbClr val="000066"/>
                 </a:solidFill>
@@ -4394,27 +4218,17 @@
                 <a:latin typeface="微軟正黑體" pitchFamily="34" charset="-120"/>
                 <a:ea typeface="微軟正黑體" pitchFamily="34" charset="-120"/>
               </a:rPr>
-              <a:t>袮</a:t>
-            </a:r>
-            <a:r>
-              <a:rPr lang="zh-TW" altLang="en-US" sz="4800" b="1" dirty="0" smtClean="0">
+              <a:t>祢</a:t>
+            </a:r>
+            <a:r>
+              <a:rPr lang="zh-TW" altLang="en-US" sz="4800" b="1" dirty="0">
                 <a:solidFill>
                   <a:srgbClr val="000066"/>
                 </a:solidFill>
                 <a:latin typeface="微軟正黑體" pitchFamily="34" charset="-120"/>
                 <a:ea typeface="微軟正黑體" pitchFamily="34" charset="-120"/>
               </a:rPr>
-              <a:t>帶</a:t>
-            </a:r>
-            <a:r>
-              <a:rPr lang="zh-TW" altLang="en-US" sz="4800" b="1" dirty="0">
-                <a:solidFill>
-                  <a:srgbClr val="000066"/>
-                </a:solidFill>
-                <a:latin typeface="微軟正黑體" pitchFamily="34" charset="-120"/>
-                <a:ea typeface="微軟正黑體" pitchFamily="34" charset="-120"/>
-              </a:rPr>
-              <a:t>領著我得勝</a:t>
+              <a:t>帶領著我得勝</a:t>
             </a:r>
           </a:p>
         </p:txBody>
@@ -4428,7 +4242,7 @@
         <p:spPr>
           <a:xfrm>
             <a:off x="0" y="3939903"/>
-            <a:ext cx="9143999" cy="646331"/>
+            <a:ext cx="9143999" cy="523220"/>
           </a:xfrm>
           <a:prstGeom prst="rect">
             <a:avLst/>
@@ -4443,44 +4257,39 @@
           <a:p>
             <a:pPr algn="ctr"/>
             <a:r>
-              <a:rPr lang="en-US" altLang="zh-TW" sz="3600" b="1" dirty="0" smtClean="0">
-                <a:solidFill>
-                  <a:srgbClr val="000066"/>
-                </a:solidFill>
-                <a:effectLst/>
+              <a:rPr lang="en-US" altLang="zh-TW" sz="2800" b="1" dirty="0">
+                <a:solidFill>
+                  <a:srgbClr val="000066"/>
+                </a:solidFill>
                 <a:latin typeface="Microsoft JhengHei" panose="020B0604030504040204" pitchFamily="34" charset="-120"/>
                 <a:ea typeface="Microsoft JhengHei" panose="020B0604030504040204" pitchFamily="34" charset="-120"/>
               </a:rPr>
               <a:t>( </a:t>
             </a:r>
             <a:r>
-              <a:rPr lang="zh-CN" altLang="en-US" sz="3600" b="1" dirty="0" smtClean="0">
-                <a:solidFill>
-                  <a:srgbClr val="000066"/>
-                </a:solidFill>
-                <a:effectLst/>
+              <a:rPr lang="zh-CN" altLang="en-US" sz="2800" b="1" dirty="0">
+                <a:solidFill>
+                  <a:srgbClr val="000066"/>
+                </a:solidFill>
                 <a:latin typeface="Microsoft JhengHei" panose="020B0604030504040204" pitchFamily="34" charset="-120"/>
                 <a:ea typeface="Microsoft JhengHei" panose="020B0604030504040204" pitchFamily="34" charset="-120"/>
               </a:rPr>
-              <a:t>副 </a:t>
-            </a:r>
-            <a:r>
-              <a:rPr lang="en-US" altLang="zh-TW" sz="3600" b="1" dirty="0" smtClean="0">
-                <a:solidFill>
-                  <a:srgbClr val="000066"/>
-                </a:solidFill>
-                <a:effectLst/>
+              <a:t>副歌 </a:t>
+            </a:r>
+            <a:r>
+              <a:rPr lang="en-US" altLang="zh-TW" sz="2800" b="1" dirty="0">
+                <a:solidFill>
+                  <a:srgbClr val="000066"/>
+                </a:solidFill>
                 <a:latin typeface="Microsoft JhengHei" panose="020B0604030504040204" pitchFamily="34" charset="-120"/>
                 <a:ea typeface="Microsoft JhengHei" panose="020B0604030504040204" pitchFamily="34" charset="-120"/>
               </a:rPr>
               <a:t>)</a:t>
             </a:r>
-            <a:endParaRPr lang="vi-VN" sz="3600" b="1" dirty="0">
+            <a:endParaRPr lang="vi-VN" sz="2800" b="1" dirty="0">
               <a:solidFill>
                 <a:srgbClr val="000066"/>
               </a:solidFill>
-              <a:effectLst/>
-              <a:latin typeface="Microsoft JhengHei" panose="020B0604030504040204" pitchFamily="34" charset="-120"/>
               <a:ea typeface="Microsoft JhengHei" panose="020B0604030504040204" pitchFamily="34" charset="-120"/>
             </a:endParaRPr>
           </a:p>
